--- a/Volunteers.pptx
+++ b/Volunteers.pptx
@@ -4,6 +4,9 @@
   <p:sldMasterIdLst>
     <p:sldMasterId id="2147483705" r:id="rId1"/>
   </p:sldMasterIdLst>
+  <p:notesMasterIdLst>
+    <p:notesMasterId r:id="rId8"/>
+  </p:notesMasterIdLst>
   <p:sldIdLst>
     <p:sldId id="256" r:id="rId2"/>
     <p:sldId id="258" r:id="rId3"/>
@@ -117,6 +120,739 @@
 </p:presentation>
 </file>
 
+<file path=ppt/notesMasters/notesMaster1.xml><?xml version="1.0" encoding="utf-8"?>
+<p:notesMaster xmlns:a="http://schemas.openxmlformats.org/drawingml/2006/main" xmlns:r="http://schemas.openxmlformats.org/officeDocument/2006/relationships" xmlns:p="http://schemas.openxmlformats.org/presentationml/2006/main">
+  <p:cSld>
+    <p:bg>
+      <p:bgRef idx="1001">
+        <a:schemeClr val="bg1"/>
+      </p:bgRef>
+    </p:bg>
+    <p:spTree>
+      <p:nvGrpSpPr>
+        <p:cNvPr id="1" name=""/>
+        <p:cNvGrpSpPr/>
+        <p:nvPr/>
+      </p:nvGrpSpPr>
+      <p:grpSpPr>
+        <a:xfrm>
+          <a:off x="0" y="0"/>
+          <a:ext cx="0" cy="0"/>
+          <a:chOff x="0" y="0"/>
+          <a:chExt cx="0" cy="0"/>
+        </a:xfrm>
+      </p:grpSpPr>
+      <p:sp>
+        <p:nvSpPr>
+          <p:cNvPr id="2" name="Header Placeholder 1"/>
+          <p:cNvSpPr>
+            <a:spLocks noGrp="1"/>
+          </p:cNvSpPr>
+          <p:nvPr>
+            <p:ph type="hdr" sz="quarter"/>
+          </p:nvPr>
+        </p:nvSpPr>
+        <p:spPr>
+          <a:xfrm>
+            <a:off x="0" y="0"/>
+            <a:ext cx="2971800" cy="458788"/>
+          </a:xfrm>
+          <a:prstGeom prst="rect">
+            <a:avLst/>
+          </a:prstGeom>
+        </p:spPr>
+        <p:txBody>
+          <a:bodyPr vert="horz" lIns="91440" tIns="45720" rIns="91440" bIns="45720" rtlCol="0"/>
+          <a:lstStyle>
+            <a:lvl1pPr algn="l">
+              <a:defRPr sz="1200"/>
+            </a:lvl1pPr>
+          </a:lstStyle>
+          <a:p>
+            <a:endParaRPr lang="en-US"/>
+          </a:p>
+        </p:txBody>
+      </p:sp>
+      <p:sp>
+        <p:nvSpPr>
+          <p:cNvPr id="3" name="Date Placeholder 2"/>
+          <p:cNvSpPr>
+            <a:spLocks noGrp="1"/>
+          </p:cNvSpPr>
+          <p:nvPr>
+            <p:ph type="dt" idx="1"/>
+          </p:nvPr>
+        </p:nvSpPr>
+        <p:spPr>
+          <a:xfrm>
+            <a:off x="3884613" y="0"/>
+            <a:ext cx="2971800" cy="458788"/>
+          </a:xfrm>
+          <a:prstGeom prst="rect">
+            <a:avLst/>
+          </a:prstGeom>
+        </p:spPr>
+        <p:txBody>
+          <a:bodyPr vert="horz" lIns="91440" tIns="45720" rIns="91440" bIns="45720" rtlCol="0"/>
+          <a:lstStyle>
+            <a:lvl1pPr algn="r">
+              <a:defRPr sz="1200"/>
+            </a:lvl1pPr>
+          </a:lstStyle>
+          <a:p>
+            <a:fld id="{318AAFA3-C793-4CF9-BAB9-E3B702F90A5F}" type="datetimeFigureOut">
+              <a:rPr lang="en-US" smtClean="0"/>
+              <a:t>7/10/2026</a:t>
+            </a:fld>
+            <a:endParaRPr lang="en-US"/>
+          </a:p>
+        </p:txBody>
+      </p:sp>
+      <p:sp>
+        <p:nvSpPr>
+          <p:cNvPr id="4" name="Slide Image Placeholder 3"/>
+          <p:cNvSpPr>
+            <a:spLocks noGrp="1" noRot="1" noChangeAspect="1"/>
+          </p:cNvSpPr>
+          <p:nvPr>
+            <p:ph type="sldImg" idx="2"/>
+          </p:nvPr>
+        </p:nvSpPr>
+        <p:spPr>
+          <a:xfrm>
+            <a:off x="685800" y="1143000"/>
+            <a:ext cx="5486400" cy="3086100"/>
+          </a:xfrm>
+          <a:prstGeom prst="rect">
+            <a:avLst/>
+          </a:prstGeom>
+          <a:noFill/>
+          <a:ln w="12700">
+            <a:solidFill>
+              <a:prstClr val="black"/>
+            </a:solidFill>
+          </a:ln>
+        </p:spPr>
+        <p:txBody>
+          <a:bodyPr vert="horz" lIns="91440" tIns="45720" rIns="91440" bIns="45720" rtlCol="0" anchor="ctr"/>
+          <a:lstStyle/>
+          <a:p>
+            <a:endParaRPr lang="en-US"/>
+          </a:p>
+        </p:txBody>
+      </p:sp>
+      <p:sp>
+        <p:nvSpPr>
+          <p:cNvPr id="5" name="Notes Placeholder 4"/>
+          <p:cNvSpPr>
+            <a:spLocks noGrp="1"/>
+          </p:cNvSpPr>
+          <p:nvPr>
+            <p:ph type="body" sz="quarter" idx="3"/>
+          </p:nvPr>
+        </p:nvSpPr>
+        <p:spPr>
+          <a:xfrm>
+            <a:off x="685800" y="4400550"/>
+            <a:ext cx="5486400" cy="3600450"/>
+          </a:xfrm>
+          <a:prstGeom prst="rect">
+            <a:avLst/>
+          </a:prstGeom>
+        </p:spPr>
+        <p:txBody>
+          <a:bodyPr vert="horz" lIns="91440" tIns="45720" rIns="91440" bIns="45720" rtlCol="0"/>
+          <a:lstStyle/>
+          <a:p>
+            <a:pPr lvl="0"/>
+            <a:r>
+              <a:rPr lang="en-US"/>
+              <a:t>Click to edit Master text styles</a:t>
+            </a:r>
+          </a:p>
+          <a:p>
+            <a:pPr lvl="1"/>
+            <a:r>
+              <a:rPr lang="en-US"/>
+              <a:t>Second level</a:t>
+            </a:r>
+          </a:p>
+          <a:p>
+            <a:pPr lvl="2"/>
+            <a:r>
+              <a:rPr lang="en-US"/>
+              <a:t>Third level</a:t>
+            </a:r>
+          </a:p>
+          <a:p>
+            <a:pPr lvl="3"/>
+            <a:r>
+              <a:rPr lang="en-US"/>
+              <a:t>Fourth level</a:t>
+            </a:r>
+          </a:p>
+          <a:p>
+            <a:pPr lvl="4"/>
+            <a:r>
+              <a:rPr lang="en-US"/>
+              <a:t>Fifth level</a:t>
+            </a:r>
+          </a:p>
+        </p:txBody>
+      </p:sp>
+      <p:sp>
+        <p:nvSpPr>
+          <p:cNvPr id="6" name="Footer Placeholder 5"/>
+          <p:cNvSpPr>
+            <a:spLocks noGrp="1"/>
+          </p:cNvSpPr>
+          <p:nvPr>
+            <p:ph type="ftr" sz="quarter" idx="4"/>
+          </p:nvPr>
+        </p:nvSpPr>
+        <p:spPr>
+          <a:xfrm>
+            <a:off x="0" y="8685213"/>
+            <a:ext cx="2971800" cy="458787"/>
+          </a:xfrm>
+          <a:prstGeom prst="rect">
+            <a:avLst/>
+          </a:prstGeom>
+        </p:spPr>
+        <p:txBody>
+          <a:bodyPr vert="horz" lIns="91440" tIns="45720" rIns="91440" bIns="45720" rtlCol="0" anchor="b"/>
+          <a:lstStyle>
+            <a:lvl1pPr algn="l">
+              <a:defRPr sz="1200"/>
+            </a:lvl1pPr>
+          </a:lstStyle>
+          <a:p>
+            <a:endParaRPr lang="en-US"/>
+          </a:p>
+        </p:txBody>
+      </p:sp>
+      <p:sp>
+        <p:nvSpPr>
+          <p:cNvPr id="7" name="Slide Number Placeholder 6"/>
+          <p:cNvSpPr>
+            <a:spLocks noGrp="1"/>
+          </p:cNvSpPr>
+          <p:nvPr>
+            <p:ph type="sldNum" sz="quarter" idx="5"/>
+          </p:nvPr>
+        </p:nvSpPr>
+        <p:spPr>
+          <a:xfrm>
+            <a:off x="3884613" y="8685213"/>
+            <a:ext cx="2971800" cy="458787"/>
+          </a:xfrm>
+          <a:prstGeom prst="rect">
+            <a:avLst/>
+          </a:prstGeom>
+        </p:spPr>
+        <p:txBody>
+          <a:bodyPr vert="horz" lIns="91440" tIns="45720" rIns="91440" bIns="45720" rtlCol="0" anchor="b"/>
+          <a:lstStyle>
+            <a:lvl1pPr algn="r">
+              <a:defRPr sz="1200"/>
+            </a:lvl1pPr>
+          </a:lstStyle>
+          <a:p>
+            <a:fld id="{AA5DEBA2-5BAE-4D27-B00D-B244487620C2}" type="slidenum">
+              <a:rPr lang="en-US" smtClean="0"/>
+              <a:t>‹#›</a:t>
+            </a:fld>
+            <a:endParaRPr lang="en-US"/>
+          </a:p>
+        </p:txBody>
+      </p:sp>
+    </p:spTree>
+    <p:extLst>
+      <p:ext uri="{BB962C8B-B14F-4D97-AF65-F5344CB8AC3E}">
+        <p14:creationId xmlns:p14="http://schemas.microsoft.com/office/powerpoint/2010/main" val="2920821140"/>
+      </p:ext>
+    </p:extLst>
+  </p:cSld>
+  <p:clrMap bg1="lt1" tx1="dk1" bg2="lt2" tx2="dk2" accent1="accent1" accent2="accent2" accent3="accent3" accent4="accent4" accent5="accent5" accent6="accent6" hlink="hlink" folHlink="folHlink"/>
+  <p:notesStyle>
+    <a:lvl1pPr marL="0" algn="l" defTabSz="914400" rtl="0" eaLnBrk="1" latinLnBrk="0" hangingPunct="1">
+      <a:defRPr sz="1200" kern="1200">
+        <a:solidFill>
+          <a:schemeClr val="tx1"/>
+        </a:solidFill>
+        <a:latin typeface="+mn-lt"/>
+        <a:ea typeface="+mn-ea"/>
+        <a:cs typeface="+mn-cs"/>
+      </a:defRPr>
+    </a:lvl1pPr>
+    <a:lvl2pPr marL="457200" algn="l" defTabSz="914400" rtl="0" eaLnBrk="1" latinLnBrk="0" hangingPunct="1">
+      <a:defRPr sz="1200" kern="1200">
+        <a:solidFill>
+          <a:schemeClr val="tx1"/>
+        </a:solidFill>
+        <a:latin typeface="+mn-lt"/>
+        <a:ea typeface="+mn-ea"/>
+        <a:cs typeface="+mn-cs"/>
+      </a:defRPr>
+    </a:lvl2pPr>
+    <a:lvl3pPr marL="914400" algn="l" defTabSz="914400" rtl="0" eaLnBrk="1" latinLnBrk="0" hangingPunct="1">
+      <a:defRPr sz="1200" kern="1200">
+        <a:solidFill>
+          <a:schemeClr val="tx1"/>
+        </a:solidFill>
+        <a:latin typeface="+mn-lt"/>
+        <a:ea typeface="+mn-ea"/>
+        <a:cs typeface="+mn-cs"/>
+      </a:defRPr>
+    </a:lvl3pPr>
+    <a:lvl4pPr marL="1371600" algn="l" defTabSz="914400" rtl="0" eaLnBrk="1" latinLnBrk="0" hangingPunct="1">
+      <a:defRPr sz="1200" kern="1200">
+        <a:solidFill>
+          <a:schemeClr val="tx1"/>
+        </a:solidFill>
+        <a:latin typeface="+mn-lt"/>
+        <a:ea typeface="+mn-ea"/>
+        <a:cs typeface="+mn-cs"/>
+      </a:defRPr>
+    </a:lvl4pPr>
+    <a:lvl5pPr marL="1828800" algn="l" defTabSz="914400" rtl="0" eaLnBrk="1" latinLnBrk="0" hangingPunct="1">
+      <a:defRPr sz="1200" kern="1200">
+        <a:solidFill>
+          <a:schemeClr val="tx1"/>
+        </a:solidFill>
+        <a:latin typeface="+mn-lt"/>
+        <a:ea typeface="+mn-ea"/>
+        <a:cs typeface="+mn-cs"/>
+      </a:defRPr>
+    </a:lvl5pPr>
+    <a:lvl6pPr marL="2286000" algn="l" defTabSz="914400" rtl="0" eaLnBrk="1" latinLnBrk="0" hangingPunct="1">
+      <a:defRPr sz="1200" kern="1200">
+        <a:solidFill>
+          <a:schemeClr val="tx1"/>
+        </a:solidFill>
+        <a:latin typeface="+mn-lt"/>
+        <a:ea typeface="+mn-ea"/>
+        <a:cs typeface="+mn-cs"/>
+      </a:defRPr>
+    </a:lvl6pPr>
+    <a:lvl7pPr marL="2743200" algn="l" defTabSz="914400" rtl="0" eaLnBrk="1" latinLnBrk="0" hangingPunct="1">
+      <a:defRPr sz="1200" kern="1200">
+        <a:solidFill>
+          <a:schemeClr val="tx1"/>
+        </a:solidFill>
+        <a:latin typeface="+mn-lt"/>
+        <a:ea typeface="+mn-ea"/>
+        <a:cs typeface="+mn-cs"/>
+      </a:defRPr>
+    </a:lvl7pPr>
+    <a:lvl8pPr marL="3200400" algn="l" defTabSz="914400" rtl="0" eaLnBrk="1" latinLnBrk="0" hangingPunct="1">
+      <a:defRPr sz="1200" kern="1200">
+        <a:solidFill>
+          <a:schemeClr val="tx1"/>
+        </a:solidFill>
+        <a:latin typeface="+mn-lt"/>
+        <a:ea typeface="+mn-ea"/>
+        <a:cs typeface="+mn-cs"/>
+      </a:defRPr>
+    </a:lvl8pPr>
+    <a:lvl9pPr marL="3657600" algn="l" defTabSz="914400" rtl="0" eaLnBrk="1" latinLnBrk="0" hangingPunct="1">
+      <a:defRPr sz="1200" kern="1200">
+        <a:solidFill>
+          <a:schemeClr val="tx1"/>
+        </a:solidFill>
+        <a:latin typeface="+mn-lt"/>
+        <a:ea typeface="+mn-ea"/>
+        <a:cs typeface="+mn-cs"/>
+      </a:defRPr>
+    </a:lvl9pPr>
+  </p:notesStyle>
+</p:notesMaster>
+</file>
+
+<file path=ppt/notesSlides/notesSlide1.xml><?xml version="1.0" encoding="utf-8"?>
+<p:notes xmlns:a="http://schemas.openxmlformats.org/drawingml/2006/main" xmlns:r="http://schemas.openxmlformats.org/officeDocument/2006/relationships" xmlns:p="http://schemas.openxmlformats.org/presentationml/2006/main">
+  <p:cSld>
+    <p:spTree>
+      <p:nvGrpSpPr>
+        <p:cNvPr id="1" name=""/>
+        <p:cNvGrpSpPr/>
+        <p:nvPr/>
+      </p:nvGrpSpPr>
+      <p:grpSpPr>
+        <a:xfrm>
+          <a:off x="0" y="0"/>
+          <a:ext cx="0" cy="0"/>
+          <a:chOff x="0" y="0"/>
+          <a:chExt cx="0" cy="0"/>
+        </a:xfrm>
+      </p:grpSpPr>
+      <p:sp>
+        <p:nvSpPr>
+          <p:cNvPr id="2" name="Slide Image Placeholder 1"/>
+          <p:cNvSpPr>
+            <a:spLocks noGrp="1" noRot="1" noChangeAspect="1"/>
+          </p:cNvSpPr>
+          <p:nvPr>
+            <p:ph type="sldImg"/>
+          </p:nvPr>
+        </p:nvSpPr>
+        <p:spPr/>
+      </p:sp>
+      <p:sp>
+        <p:nvSpPr>
+          <p:cNvPr id="3" name="Notes Placeholder 2"/>
+          <p:cNvSpPr>
+            <a:spLocks noGrp="1"/>
+          </p:cNvSpPr>
+          <p:nvPr>
+            <p:ph type="body" idx="1"/>
+          </p:nvPr>
+        </p:nvSpPr>
+        <p:spPr/>
+        <p:txBody>
+          <a:bodyPr/>
+          <a:lstStyle/>
+          <a:p>
+            <a:r>
+              <a:rPr lang="en-US" dirty="0"/>
+              <a:t>The first graph shows total incidents over the years. The range being year 2000 to 2016. There is a major spike in 2001 correlating to the 9/11 attack but afterwards we see a steep decline followed by another upward trend starting in 2007.</a:t>
+            </a:r>
+          </a:p>
+          <a:p>
+            <a:endParaRPr lang="en-US" dirty="0"/>
+          </a:p>
+          <a:p>
+            <a:r>
+              <a:rPr lang="en-US" dirty="0"/>
+              <a:t>The model on the right is the forecasted activity based off prior events and focused around our trend line. We see here that  ~20 events are forecasted to take place each month in next few years (assuming we are in 2016) with a continual increase in the following years.  </a:t>
+            </a:r>
+          </a:p>
+        </p:txBody>
+      </p:sp>
+      <p:sp>
+        <p:nvSpPr>
+          <p:cNvPr id="4" name="Slide Number Placeholder 3"/>
+          <p:cNvSpPr>
+            <a:spLocks noGrp="1"/>
+          </p:cNvSpPr>
+          <p:nvPr>
+            <p:ph type="sldNum" sz="quarter" idx="5"/>
+          </p:nvPr>
+        </p:nvSpPr>
+        <p:spPr/>
+        <p:txBody>
+          <a:bodyPr/>
+          <a:lstStyle/>
+          <a:p>
+            <a:fld id="{AA5DEBA2-5BAE-4D27-B00D-B244487620C2}" type="slidenum">
+              <a:rPr lang="en-US" smtClean="0"/>
+              <a:t>3</a:t>
+            </a:fld>
+            <a:endParaRPr lang="en-US"/>
+          </a:p>
+        </p:txBody>
+      </p:sp>
+    </p:spTree>
+    <p:extLst>
+      <p:ext uri="{BB962C8B-B14F-4D97-AF65-F5344CB8AC3E}">
+        <p14:creationId xmlns:p14="http://schemas.microsoft.com/office/powerpoint/2010/main" val="2928499290"/>
+      </p:ext>
+    </p:extLst>
+  </p:cSld>
+  <p:clrMapOvr>
+    <a:masterClrMapping/>
+  </p:clrMapOvr>
+</p:notes>
+</file>
+
+<file path=ppt/notesSlides/notesSlide2.xml><?xml version="1.0" encoding="utf-8"?>
+<p:notes xmlns:a="http://schemas.openxmlformats.org/drawingml/2006/main" xmlns:r="http://schemas.openxmlformats.org/officeDocument/2006/relationships" xmlns:p="http://schemas.openxmlformats.org/presentationml/2006/main">
+  <p:cSld>
+    <p:spTree>
+      <p:nvGrpSpPr>
+        <p:cNvPr id="1" name=""/>
+        <p:cNvGrpSpPr/>
+        <p:nvPr/>
+      </p:nvGrpSpPr>
+      <p:grpSpPr>
+        <a:xfrm>
+          <a:off x="0" y="0"/>
+          <a:ext cx="0" cy="0"/>
+          <a:chOff x="0" y="0"/>
+          <a:chExt cx="0" cy="0"/>
+        </a:xfrm>
+      </p:grpSpPr>
+      <p:sp>
+        <p:nvSpPr>
+          <p:cNvPr id="2" name="Slide Image Placeholder 1"/>
+          <p:cNvSpPr>
+            <a:spLocks noGrp="1" noRot="1" noChangeAspect="1"/>
+          </p:cNvSpPr>
+          <p:nvPr>
+            <p:ph type="sldImg"/>
+          </p:nvPr>
+        </p:nvSpPr>
+        <p:spPr/>
+      </p:sp>
+      <p:sp>
+        <p:nvSpPr>
+          <p:cNvPr id="3" name="Notes Placeholder 2"/>
+          <p:cNvSpPr>
+            <a:spLocks noGrp="1"/>
+          </p:cNvSpPr>
+          <p:nvPr>
+            <p:ph type="body" idx="1"/>
+          </p:nvPr>
+        </p:nvSpPr>
+        <p:spPr/>
+        <p:txBody>
+          <a:bodyPr/>
+          <a:lstStyle/>
+          <a:p>
+            <a:r>
+              <a:rPr lang="en-US" dirty="0"/>
+              <a:t>Using a heat map to illustrate the terrorist activity, South America has the highest density shown by our red spots. North America also has a good spread but is heavily spread out when zoomed in.</a:t>
+            </a:r>
+          </a:p>
+          <a:p>
+            <a:endParaRPr lang="en-US" dirty="0"/>
+          </a:p>
+          <a:p>
+            <a:r>
+              <a:rPr lang="en-US" dirty="0"/>
+              <a:t>Zooming in on Colombia, shows that most of the area is affected by terrorist threats and would benefit most from localized intervention. Deploying resources in the forms of enhanced emergency response, community awareness programs, and monitoring capabilities may have immediate impacts to reducing incidents and casualties.</a:t>
+            </a:r>
+          </a:p>
+        </p:txBody>
+      </p:sp>
+      <p:sp>
+        <p:nvSpPr>
+          <p:cNvPr id="4" name="Slide Number Placeholder 3"/>
+          <p:cNvSpPr>
+            <a:spLocks noGrp="1"/>
+          </p:cNvSpPr>
+          <p:nvPr>
+            <p:ph type="sldNum" sz="quarter" idx="5"/>
+          </p:nvPr>
+        </p:nvSpPr>
+        <p:spPr/>
+        <p:txBody>
+          <a:bodyPr/>
+          <a:lstStyle/>
+          <a:p>
+            <a:fld id="{AA5DEBA2-5BAE-4D27-B00D-B244487620C2}" type="slidenum">
+              <a:rPr lang="en-US" smtClean="0"/>
+              <a:t>4</a:t>
+            </a:fld>
+            <a:endParaRPr lang="en-US"/>
+          </a:p>
+        </p:txBody>
+      </p:sp>
+    </p:spTree>
+    <p:extLst>
+      <p:ext uri="{BB962C8B-B14F-4D97-AF65-F5344CB8AC3E}">
+        <p14:creationId xmlns:p14="http://schemas.microsoft.com/office/powerpoint/2010/main" val="2491089799"/>
+      </p:ext>
+    </p:extLst>
+  </p:cSld>
+  <p:clrMapOvr>
+    <a:masterClrMapping/>
+  </p:clrMapOvr>
+</p:notes>
+</file>
+
+<file path=ppt/notesSlides/notesSlide3.xml><?xml version="1.0" encoding="utf-8"?>
+<p:notes xmlns:a="http://schemas.openxmlformats.org/drawingml/2006/main" xmlns:r="http://schemas.openxmlformats.org/officeDocument/2006/relationships" xmlns:p="http://schemas.openxmlformats.org/presentationml/2006/main">
+  <p:cSld>
+    <p:spTree>
+      <p:nvGrpSpPr>
+        <p:cNvPr id="1" name=""/>
+        <p:cNvGrpSpPr/>
+        <p:nvPr/>
+      </p:nvGrpSpPr>
+      <p:grpSpPr>
+        <a:xfrm>
+          <a:off x="0" y="0"/>
+          <a:ext cx="0" cy="0"/>
+          <a:chOff x="0" y="0"/>
+          <a:chExt cx="0" cy="0"/>
+        </a:xfrm>
+      </p:grpSpPr>
+      <p:sp>
+        <p:nvSpPr>
+          <p:cNvPr id="2" name="Slide Image Placeholder 1"/>
+          <p:cNvSpPr>
+            <a:spLocks noGrp="1" noRot="1" noChangeAspect="1"/>
+          </p:cNvSpPr>
+          <p:nvPr>
+            <p:ph type="sldImg"/>
+          </p:nvPr>
+        </p:nvSpPr>
+        <p:spPr/>
+      </p:sp>
+      <p:sp>
+        <p:nvSpPr>
+          <p:cNvPr id="3" name="Notes Placeholder 2"/>
+          <p:cNvSpPr>
+            <a:spLocks noGrp="1"/>
+          </p:cNvSpPr>
+          <p:nvPr>
+            <p:ph type="body" idx="1"/>
+          </p:nvPr>
+        </p:nvSpPr>
+        <p:spPr/>
+        <p:txBody>
+          <a:bodyPr/>
+          <a:lstStyle/>
+          <a:p>
+            <a:r>
+              <a:rPr lang="en-US" dirty="0"/>
+              <a:t>Mitigating casualties in terrorist attacks would be most effective when considering seasonality and location. We can see on the left chart that average casualty counts spike and dip depending on the month they happen and are influenced heavily by location as seen in the chart on the right illustrating that Latitude of an event has a higher odds of increasing fatalities. </a:t>
+            </a:r>
+          </a:p>
+          <a:p>
+            <a:endParaRPr lang="en-US" dirty="0"/>
+          </a:p>
+          <a:p>
+            <a:r>
+              <a:rPr lang="en-US" dirty="0"/>
+              <a:t>Knowing this, we can focus on timing for community programs and response forecasting. Ensuring awareness and staffing is high in the right locations may drastically lower our casualty counts.  </a:t>
+            </a:r>
+          </a:p>
+        </p:txBody>
+      </p:sp>
+      <p:sp>
+        <p:nvSpPr>
+          <p:cNvPr id="4" name="Slide Number Placeholder 3"/>
+          <p:cNvSpPr>
+            <a:spLocks noGrp="1"/>
+          </p:cNvSpPr>
+          <p:nvPr>
+            <p:ph type="sldNum" sz="quarter" idx="5"/>
+          </p:nvPr>
+        </p:nvSpPr>
+        <p:spPr/>
+        <p:txBody>
+          <a:bodyPr/>
+          <a:lstStyle/>
+          <a:p>
+            <a:fld id="{AA5DEBA2-5BAE-4D27-B00D-B244487620C2}" type="slidenum">
+              <a:rPr lang="en-US" smtClean="0"/>
+              <a:t>5</a:t>
+            </a:fld>
+            <a:endParaRPr lang="en-US"/>
+          </a:p>
+        </p:txBody>
+      </p:sp>
+    </p:spTree>
+    <p:extLst>
+      <p:ext uri="{BB962C8B-B14F-4D97-AF65-F5344CB8AC3E}">
+        <p14:creationId xmlns:p14="http://schemas.microsoft.com/office/powerpoint/2010/main" val="202375497"/>
+      </p:ext>
+    </p:extLst>
+  </p:cSld>
+  <p:clrMapOvr>
+    <a:masterClrMapping/>
+  </p:clrMapOvr>
+</p:notes>
+</file>
+
+<file path=ppt/notesSlides/notesSlide4.xml><?xml version="1.0" encoding="utf-8"?>
+<p:notes xmlns:a="http://schemas.openxmlformats.org/drawingml/2006/main" xmlns:r="http://schemas.openxmlformats.org/officeDocument/2006/relationships" xmlns:p="http://schemas.openxmlformats.org/presentationml/2006/main">
+  <p:cSld>
+    <p:spTree>
+      <p:nvGrpSpPr>
+        <p:cNvPr id="1" name=""/>
+        <p:cNvGrpSpPr/>
+        <p:nvPr/>
+      </p:nvGrpSpPr>
+      <p:grpSpPr>
+        <a:xfrm>
+          <a:off x="0" y="0"/>
+          <a:ext cx="0" cy="0"/>
+          <a:chOff x="0" y="0"/>
+          <a:chExt cx="0" cy="0"/>
+        </a:xfrm>
+      </p:grpSpPr>
+      <p:sp>
+        <p:nvSpPr>
+          <p:cNvPr id="2" name="Slide Image Placeholder 1"/>
+          <p:cNvSpPr>
+            <a:spLocks noGrp="1" noRot="1" noChangeAspect="1"/>
+          </p:cNvSpPr>
+          <p:nvPr>
+            <p:ph type="sldImg"/>
+          </p:nvPr>
+        </p:nvSpPr>
+        <p:spPr/>
+      </p:sp>
+      <p:sp>
+        <p:nvSpPr>
+          <p:cNvPr id="3" name="Notes Placeholder 2"/>
+          <p:cNvSpPr>
+            <a:spLocks noGrp="1"/>
+          </p:cNvSpPr>
+          <p:nvPr>
+            <p:ph type="body" idx="1"/>
+          </p:nvPr>
+        </p:nvSpPr>
+        <p:spPr/>
+        <p:txBody>
+          <a:bodyPr/>
+          <a:lstStyle/>
+          <a:p>
+            <a:r>
+              <a:rPr lang="en-US" dirty="0"/>
+              <a:t>The data provided on terrorist activity paints Colombia as being the hottest area with the most casualty counts. There are no resources that Colombia would not benefit from gaining and it’s suggestive that any action would make an impact to lower the activity and casualty count. </a:t>
+            </a:r>
+          </a:p>
+          <a:p>
+            <a:endParaRPr lang="en-US" dirty="0"/>
+          </a:p>
+          <a:p>
+            <a:r>
+              <a:rPr lang="en-US" dirty="0"/>
+              <a:t>While terrorist activity is spread throughout North America, the concentration of events is not as centralized as we see in South America. This doesn’t negate the need for resources but rather suggests that the most beneficial resource may be monitorization and community programs to increase vigilance.  </a:t>
+            </a:r>
+          </a:p>
+        </p:txBody>
+      </p:sp>
+      <p:sp>
+        <p:nvSpPr>
+          <p:cNvPr id="4" name="Slide Number Placeholder 3"/>
+          <p:cNvSpPr>
+            <a:spLocks noGrp="1"/>
+          </p:cNvSpPr>
+          <p:nvPr>
+            <p:ph type="sldNum" sz="quarter" idx="5"/>
+          </p:nvPr>
+        </p:nvSpPr>
+        <p:spPr/>
+        <p:txBody>
+          <a:bodyPr/>
+          <a:lstStyle/>
+          <a:p>
+            <a:fld id="{AA5DEBA2-5BAE-4D27-B00D-B244487620C2}" type="slidenum">
+              <a:rPr lang="en-US" smtClean="0"/>
+              <a:t>6</a:t>
+            </a:fld>
+            <a:endParaRPr lang="en-US"/>
+          </a:p>
+        </p:txBody>
+      </p:sp>
+    </p:spTree>
+    <p:extLst>
+      <p:ext uri="{BB962C8B-B14F-4D97-AF65-F5344CB8AC3E}">
+        <p14:creationId xmlns:p14="http://schemas.microsoft.com/office/powerpoint/2010/main" val="1416210841"/>
+      </p:ext>
+    </p:extLst>
+  </p:cSld>
+  <p:clrMapOvr>
+    <a:masterClrMapping/>
+  </p:clrMapOvr>
+</p:notes>
+</file>
+
 <file path=ppt/slideLayouts/slideLayout1.xml><?xml version="1.0" encoding="utf-8"?>
 <p:sldLayout xmlns:a="http://schemas.openxmlformats.org/drawingml/2006/main" xmlns:r="http://schemas.openxmlformats.org/officeDocument/2006/relationships" xmlns:p="http://schemas.openxmlformats.org/presentationml/2006/main" showMasterSp="0" type="title" preserve="1">
   <p:cSld name="Title Slide">
@@ -171,6 +907,13 @@
             <a:schemeClr val="lt1"/>
           </a:fontRef>
         </p:style>
+        <p:txBody>
+          <a:bodyPr/>
+          <a:lstStyle/>
+          <a:p>
+            <a:endParaRPr lang="en-US"/>
+          </a:p>
+        </p:txBody>
       </p:sp>
       <p:sp>
         <p:nvSpPr>
@@ -209,6 +952,13 @@
             <a:schemeClr val="lt1"/>
           </a:fontRef>
         </p:style>
+        <p:txBody>
+          <a:bodyPr/>
+          <a:lstStyle/>
+          <a:p>
+            <a:endParaRPr lang="en-US"/>
+          </a:p>
+        </p:txBody>
       </p:sp>
       <p:sp>
         <p:nvSpPr>
@@ -3123,6 +3873,13 @@
             <a:schemeClr val="lt1"/>
           </a:fontRef>
         </p:style>
+        <p:txBody>
+          <a:bodyPr/>
+          <a:lstStyle/>
+          <a:p>
+            <a:endParaRPr lang="en-US"/>
+          </a:p>
+        </p:txBody>
       </p:sp>
       <p:sp>
         <p:nvSpPr>
@@ -3161,6 +3918,13 @@
             <a:schemeClr val="lt1"/>
           </a:fontRef>
         </p:style>
+        <p:txBody>
+          <a:bodyPr/>
+          <a:lstStyle/>
+          <a:p>
+            <a:endParaRPr lang="en-US"/>
+          </a:p>
+        </p:txBody>
       </p:sp>
       <p:sp>
         <p:nvSpPr>
@@ -4080,40 +4844,6 @@
       </p:grpSpPr>
       <p:sp>
         <p:nvSpPr>
-          <p:cNvPr id="2" name="Title 1">
-            <a:extLst>
-              <a:ext uri="{FF2B5EF4-FFF2-40B4-BE49-F238E27FC236}">
-                <a16:creationId xmlns:a16="http://schemas.microsoft.com/office/drawing/2014/main" id="{B9736437-76ED-BA00-0BD5-BB6E8139C8AA}"/>
-              </a:ext>
-            </a:extLst>
-          </p:cNvPr>
-          <p:cNvSpPr>
-            <a:spLocks noGrp="1"/>
-          </p:cNvSpPr>
-          <p:nvPr>
-            <p:ph type="title"/>
-          </p:nvPr>
-        </p:nvSpPr>
-        <p:spPr/>
-        <p:txBody>
-          <a:bodyPr>
-            <a:normAutofit/>
-          </a:bodyPr>
-          <a:lstStyle/>
-          <a:p>
-            <a:r>
-              <a:rPr lang="en-US" dirty="0"/>
-              <a:t>Methodology</a:t>
-            </a:r>
-            <a:br>
-              <a:rPr lang="en-US" dirty="0"/>
-            </a:br>
-            <a:endParaRPr lang="en-US" dirty="0"/>
-          </a:p>
-        </p:txBody>
-      </p:sp>
-      <p:sp>
-        <p:nvSpPr>
           <p:cNvPr id="3" name="Content Placeholder 2">
             <a:extLst>
               <a:ext uri="{FF2B5EF4-FFF2-40B4-BE49-F238E27FC236}">
@@ -4125,23 +4855,42 @@
             <a:spLocks noGrp="1"/>
           </p:cNvSpPr>
           <p:nvPr>
-            <p:ph idx="1"/>
-          </p:nvPr>
-        </p:nvSpPr>
-        <p:spPr/>
-        <p:txBody>
-          <a:bodyPr/>
-          <a:lstStyle/>
+            <p:ph idx="4294967295"/>
+          </p:nvPr>
+        </p:nvSpPr>
+        <p:spPr>
+          <a:xfrm>
+            <a:off x="1066800" y="760413"/>
+            <a:ext cx="10058400" cy="5189537"/>
+          </a:xfrm>
+        </p:spPr>
+        <p:txBody>
+          <a:bodyPr>
+            <a:normAutofit/>
+          </a:bodyPr>
+          <a:lstStyle/>
+          <a:p>
+            <a:r>
+              <a:rPr lang="en-US" sz="3600" b="1" dirty="0"/>
+              <a:t>Methodology</a:t>
+            </a:r>
+          </a:p>
           <a:p>
             <a:r>
               <a:rPr lang="en-US" dirty="0"/>
-              <a:t>*summarize dataset</a:t>
+              <a:t>- Our dataset encompassed terrorism incidents in North and South America from 2000-2017.  </a:t>
             </a:r>
           </a:p>
           <a:p>
             <a:r>
               <a:rPr lang="en-US" dirty="0"/>
-              <a:t>*provide presentation Overview</a:t>
+              <a:t>- Event casualty (wounded and killed) information is the main narrative for this data set.</a:t>
+            </a:r>
+          </a:p>
+          <a:p>
+            <a:r>
+              <a:rPr lang="en-US" dirty="0"/>
+              <a:t>- Preventing further casualties through resource allocation can be determined by looking at activity and location.   </a:t>
             </a:r>
           </a:p>
           <a:p>
@@ -4151,13 +4900,58 @@
             <a:endParaRPr lang="en-US" dirty="0"/>
           </a:p>
           <a:p>
+            <a:pPr marL="0" indent="0">
+              <a:buNone/>
+            </a:pPr>
+            <a:r>
+              <a:rPr lang="en-US" sz="3600" b="1" dirty="0"/>
+              <a:t>Overview:</a:t>
+            </a:r>
+          </a:p>
+          <a:p>
+            <a:pPr marL="0" indent="0">
+              <a:buNone/>
+            </a:pPr>
+            <a:r>
+              <a:rPr lang="en-US" dirty="0"/>
+              <a:t>Time Series – What has/does terrorism activity looked like. </a:t>
+            </a:r>
+          </a:p>
+          <a:p>
+            <a:pPr marL="0" indent="0">
+              <a:buNone/>
+            </a:pPr>
+            <a:r>
+              <a:rPr lang="en-US" dirty="0"/>
+              <a:t>Geospatial – Which areas have the most terrorist activities.</a:t>
+            </a:r>
+          </a:p>
+          <a:p>
+            <a:pPr marL="0" indent="0">
+              <a:buNone/>
+            </a:pPr>
+            <a:r>
+              <a:rPr lang="en-US" dirty="0"/>
+              <a:t>SHAP – Are there any factors that influence casualties. </a:t>
+            </a:r>
+          </a:p>
+          <a:p>
+            <a:pPr marL="0" indent="0">
+              <a:buNone/>
+            </a:pPr>
+            <a:r>
+              <a:rPr lang="en-US" dirty="0"/>
+              <a:t>Recommendation – Where should our resources be distributed and what are the risks?</a:t>
+            </a:r>
+          </a:p>
+          <a:p>
+            <a:pPr marL="0" indent="0">
+              <a:buNone/>
+            </a:pPr>
             <a:endParaRPr lang="en-US" dirty="0"/>
           </a:p>
           <a:p>
-            <a:r>
-              <a:rPr lang="en-US" dirty="0"/>
-              <a:t>Why do we care?</a:t>
-            </a:r>
+            <a:endParaRPr lang="en-US" dirty="0"/>
           </a:p>
         </p:txBody>
       </p:sp>
@@ -4215,13 +5009,13 @@
         </p:spPr>
         <p:txBody>
           <a:bodyPr>
-            <a:normAutofit fontScale="90000"/>
+            <a:normAutofit/>
           </a:bodyPr>
           <a:lstStyle/>
           <a:p>
             <a:r>
               <a:rPr lang="en-US" sz="4000" b="1" dirty="0"/>
-              <a:t>The Question: </a:t>
+              <a:t>Question: </a:t>
             </a:r>
             <a:r>
               <a:rPr lang="en-US" sz="4000" dirty="0"/>
@@ -4245,7 +5039,7 @@
           <p:nvPr/>
         </p:nvPicPr>
         <p:blipFill>
-          <a:blip r:embed="rId2"/>
+          <a:blip r:embed="rId3"/>
           <a:stretch>
             <a:fillRect/>
           </a:stretch>
@@ -4275,7 +5069,7 @@
           <p:nvPr/>
         </p:nvPicPr>
         <p:blipFill>
-          <a:blip r:embed="rId3"/>
+          <a:blip r:embed="rId4"/>
           <a:stretch>
             <a:fillRect/>
           </a:stretch>
@@ -4378,14 +5172,14 @@
           <p:nvPr/>
         </p:nvPicPr>
         <p:blipFill>
-          <a:blip r:embed="rId2"/>
+          <a:blip r:embed="rId3"/>
           <a:stretch>
             <a:fillRect/>
           </a:stretch>
         </p:blipFill>
         <p:spPr>
           <a:xfrm>
-            <a:off x="302316" y="1867196"/>
+            <a:off x="302316" y="1867195"/>
             <a:ext cx="4199346" cy="4123371"/>
           </a:xfrm>
           <a:prstGeom prst="rect">
@@ -4408,7 +5202,7 @@
           <p:nvPr/>
         </p:nvPicPr>
         <p:blipFill>
-          <a:blip r:embed="rId3"/>
+          <a:blip r:embed="rId4"/>
           <a:stretch>
             <a:fillRect/>
           </a:stretch>
@@ -4438,7 +5232,7 @@
         <p:spPr>
           <a:xfrm>
             <a:off x="4548554" y="1867196"/>
-            <a:ext cx="3400396" cy="1754326"/>
+            <a:ext cx="3400396" cy="2585323"/>
           </a:xfrm>
           <a:prstGeom prst="rect">
             <a:avLst/>
@@ -4453,8 +5247,17 @@
           <a:p>
             <a:r>
               <a:rPr lang="en-US" dirty="0"/>
-              <a:t>Dataset locations: North and South America</a:t>
-            </a:r>
+              <a:t>North America</a:t>
+            </a:r>
+          </a:p>
+          <a:p>
+            <a:r>
+              <a:rPr lang="en-US" dirty="0"/>
+              <a:t>- East coast contains major activity spots</a:t>
+            </a:r>
+          </a:p>
+          <a:p>
+            <a:endParaRPr lang="en-US" dirty="0"/>
           </a:p>
           <a:p>
             <a:endParaRPr lang="en-US" dirty="0"/>
@@ -4466,7 +5269,10 @@
             </a:r>
           </a:p>
           <a:p>
-            <a:endParaRPr lang="en-US" dirty="0"/>
+            <a:r>
+              <a:rPr lang="en-US" dirty="0"/>
+              <a:t>-Colombia hottest spot with most incidents </a:t>
+            </a:r>
           </a:p>
           <a:p>
             <a:endParaRPr lang="en-US" dirty="0"/>
@@ -4525,11 +5331,185 @@
           <a:p>
             <a:r>
               <a:rPr lang="en-US" sz="4000" b="1" dirty="0"/>
-              <a:t>The Question: </a:t>
+              <a:t>Question: </a:t>
             </a:r>
             <a:r>
               <a:rPr lang="en-US" sz="4000" dirty="0"/>
               <a:t>Which areas see the most activity?</a:t>
+            </a:r>
+          </a:p>
+        </p:txBody>
+      </p:sp>
+      <p:sp>
+        <p:nvSpPr>
+          <p:cNvPr id="8" name="Oval 7">
+            <a:extLst>
+              <a:ext uri="{FF2B5EF4-FFF2-40B4-BE49-F238E27FC236}">
+                <a16:creationId xmlns:a16="http://schemas.microsoft.com/office/drawing/2014/main" id="{2F7B2CBA-3379-D3E7-CF5B-6F62FF106401}"/>
+              </a:ext>
+            </a:extLst>
+          </p:cNvPr>
+          <p:cNvSpPr/>
+          <p:nvPr/>
+        </p:nvSpPr>
+        <p:spPr>
+          <a:xfrm>
+            <a:off x="2114550" y="3829050"/>
+            <a:ext cx="889000" cy="812800"/>
+          </a:xfrm>
+          <a:prstGeom prst="ellipse">
+            <a:avLst/>
+          </a:prstGeom>
+          <a:noFill/>
+          <a:ln>
+            <a:solidFill>
+              <a:srgbClr val="FF0000"/>
+            </a:solidFill>
+          </a:ln>
+        </p:spPr>
+        <p:style>
+          <a:lnRef idx="2">
+            <a:schemeClr val="accent1">
+              <a:shade val="15000"/>
+            </a:schemeClr>
+          </a:lnRef>
+          <a:fillRef idx="1">
+            <a:schemeClr val="accent1"/>
+          </a:fillRef>
+          <a:effectRef idx="0">
+            <a:schemeClr val="accent1"/>
+          </a:effectRef>
+          <a:fontRef idx="minor">
+            <a:schemeClr val="lt1"/>
+          </a:fontRef>
+        </p:style>
+        <p:txBody>
+          <a:bodyPr rtlCol="0" anchor="ctr"/>
+          <a:lstStyle/>
+          <a:p>
+            <a:pPr algn="ctr"/>
+            <a:endParaRPr lang="en-US"/>
+          </a:p>
+        </p:txBody>
+      </p:sp>
+      <p:sp>
+        <p:nvSpPr>
+          <p:cNvPr id="11" name="Oval 10">
+            <a:extLst>
+              <a:ext uri="{FF2B5EF4-FFF2-40B4-BE49-F238E27FC236}">
+                <a16:creationId xmlns:a16="http://schemas.microsoft.com/office/drawing/2014/main" id="{555B07E0-38E8-F65C-F0E3-D7BDB0B3F21C}"/>
+              </a:ext>
+            </a:extLst>
+          </p:cNvPr>
+          <p:cNvSpPr/>
+          <p:nvPr/>
+        </p:nvSpPr>
+        <p:spPr>
+          <a:xfrm>
+            <a:off x="1676400" y="2315163"/>
+            <a:ext cx="1168400" cy="1113837"/>
+          </a:xfrm>
+          <a:prstGeom prst="ellipse">
+            <a:avLst/>
+          </a:prstGeom>
+          <a:noFill/>
+          <a:ln>
+            <a:solidFill>
+              <a:srgbClr val="FF0000"/>
+            </a:solidFill>
+          </a:ln>
+        </p:spPr>
+        <p:style>
+          <a:lnRef idx="2">
+            <a:schemeClr val="accent1">
+              <a:shade val="15000"/>
+            </a:schemeClr>
+          </a:lnRef>
+          <a:fillRef idx="1">
+            <a:schemeClr val="accent1"/>
+          </a:fillRef>
+          <a:effectRef idx="0">
+            <a:schemeClr val="accent1"/>
+          </a:effectRef>
+          <a:fontRef idx="minor">
+            <a:schemeClr val="lt1"/>
+          </a:fontRef>
+        </p:style>
+        <p:txBody>
+          <a:bodyPr rtlCol="0" anchor="ctr"/>
+          <a:lstStyle/>
+          <a:p>
+            <a:pPr algn="ctr"/>
+            <a:endParaRPr lang="en-US"/>
+          </a:p>
+        </p:txBody>
+      </p:sp>
+      <p:sp>
+        <p:nvSpPr>
+          <p:cNvPr id="12" name="TextBox 11">
+            <a:extLst>
+              <a:ext uri="{FF2B5EF4-FFF2-40B4-BE49-F238E27FC236}">
+                <a16:creationId xmlns:a16="http://schemas.microsoft.com/office/drawing/2014/main" id="{8546CBF0-6512-E9DF-C4B0-37553F354C04}"/>
+              </a:ext>
+            </a:extLst>
+          </p:cNvPr>
+          <p:cNvSpPr txBox="1"/>
+          <p:nvPr/>
+        </p:nvSpPr>
+        <p:spPr>
+          <a:xfrm>
+            <a:off x="1028700" y="1441450"/>
+            <a:ext cx="2451100" cy="368300"/>
+          </a:xfrm>
+          <a:prstGeom prst="rect">
+            <a:avLst/>
+          </a:prstGeom>
+          <a:noFill/>
+        </p:spPr>
+        <p:txBody>
+          <a:bodyPr wrap="square" rtlCol="0">
+            <a:spAutoFit/>
+          </a:bodyPr>
+          <a:lstStyle/>
+          <a:p>
+            <a:r>
+              <a:rPr lang="en-US" dirty="0"/>
+              <a:t>Location Overview</a:t>
+            </a:r>
+          </a:p>
+        </p:txBody>
+      </p:sp>
+      <p:sp>
+        <p:nvSpPr>
+          <p:cNvPr id="15" name="TextBox 14">
+            <a:extLst>
+              <a:ext uri="{FF2B5EF4-FFF2-40B4-BE49-F238E27FC236}">
+                <a16:creationId xmlns:a16="http://schemas.microsoft.com/office/drawing/2014/main" id="{4922A2F6-00F8-D5FC-77C0-83D2ED1AB89E}"/>
+              </a:ext>
+            </a:extLst>
+          </p:cNvPr>
+          <p:cNvSpPr txBox="1"/>
+          <p:nvPr/>
+        </p:nvSpPr>
+        <p:spPr>
+          <a:xfrm>
+            <a:off x="8801100" y="1440418"/>
+            <a:ext cx="2667000" cy="369332"/>
+          </a:xfrm>
+          <a:prstGeom prst="rect">
+            <a:avLst/>
+          </a:prstGeom>
+          <a:noFill/>
+        </p:spPr>
+        <p:txBody>
+          <a:bodyPr wrap="square" rtlCol="0">
+            <a:spAutoFit/>
+          </a:bodyPr>
+          <a:lstStyle/>
+          <a:p>
+            <a:r>
+              <a:rPr lang="en-US" dirty="0"/>
+              <a:t>South America, Colombia</a:t>
             </a:r>
           </a:p>
         </p:txBody>
@@ -4593,19 +5573,19 @@
           <a:lstStyle/>
           <a:p>
             <a:r>
-              <a:rPr lang="en-US" dirty="0" err="1"/>
+              <a:rPr lang="en-US" b="1" dirty="0" err="1"/>
               <a:t>SHAP</a:t>
             </a:r>
             <a:r>
-              <a:rPr lang="en-US" sz="1400" dirty="0" err="1"/>
+              <a:rPr lang="en-US" sz="1400" b="1" dirty="0" err="1"/>
               <a:t>iro</a:t>
             </a:r>
             <a:r>
-              <a:rPr lang="en-US" sz="1400" dirty="0"/>
+              <a:rPr lang="en-US" sz="1400" b="1" dirty="0"/>
               <a:t>      </a:t>
             </a:r>
             <a:r>
-              <a:rPr lang="en-US" dirty="0"/>
+              <a:rPr lang="en-US" b="1" dirty="0"/>
               <a:t>Fatality Influencers</a:t>
             </a:r>
             <a:br>
@@ -4659,7 +5639,7 @@
           </p:nvPr>
         </p:nvPicPr>
         <p:blipFill>
-          <a:blip r:embed="rId2"/>
+          <a:blip r:embed="rId3"/>
           <a:srcRect b="14326"/>
           <a:stretch>
             <a:fillRect/>
@@ -4689,7 +5669,7 @@
         </p:nvSpPr>
         <p:spPr>
           <a:xfrm>
-            <a:off x="6126480" y="5120641"/>
+            <a:off x="5977200" y="5140491"/>
             <a:ext cx="4202607" cy="461665"/>
           </a:xfrm>
           <a:prstGeom prst="rect">
@@ -4777,7 +5757,7 @@
           <p:nvPr/>
         </p:nvPicPr>
         <p:blipFill>
-          <a:blip r:embed="rId3"/>
+          <a:blip r:embed="rId4"/>
           <a:stretch>
             <a:fillRect/>
           </a:stretch>
@@ -5131,6 +6111,211 @@
           <a:p>
             <a:pPr algn="ctr"/>
             <a:endParaRPr lang="en-US"/>
+          </a:p>
+        </p:txBody>
+      </p:sp>
+      <p:sp>
+        <p:nvSpPr>
+          <p:cNvPr id="24" name="TextBox 23">
+            <a:extLst>
+              <a:ext uri="{FF2B5EF4-FFF2-40B4-BE49-F238E27FC236}">
+                <a16:creationId xmlns:a16="http://schemas.microsoft.com/office/drawing/2014/main" id="{5F7D9B39-9C60-1402-C44E-360DAA6F80F5}"/>
+              </a:ext>
+            </a:extLst>
+          </p:cNvPr>
+          <p:cNvSpPr txBox="1"/>
+          <p:nvPr/>
+        </p:nvSpPr>
+        <p:spPr>
+          <a:xfrm>
+            <a:off x="5893694" y="3433271"/>
+            <a:ext cx="972927" cy="276999"/>
+          </a:xfrm>
+          <a:prstGeom prst="rect">
+            <a:avLst/>
+          </a:prstGeom>
+          <a:solidFill>
+            <a:schemeClr val="bg1"/>
+          </a:solidFill>
+        </p:spPr>
+        <p:txBody>
+          <a:bodyPr wrap="square" rtlCol="0">
+            <a:spAutoFit/>
+          </a:bodyPr>
+          <a:lstStyle/>
+          <a:p>
+            <a:r>
+              <a:rPr lang="en-US" sz="1200" dirty="0">
+                <a:solidFill>
+                  <a:srgbClr val="545454"/>
+                </a:solidFill>
+              </a:rPr>
+              <a:t>Wounded</a:t>
+            </a:r>
+          </a:p>
+        </p:txBody>
+      </p:sp>
+      <p:sp>
+        <p:nvSpPr>
+          <p:cNvPr id="26" name="TextBox 25">
+            <a:extLst>
+              <a:ext uri="{FF2B5EF4-FFF2-40B4-BE49-F238E27FC236}">
+                <a16:creationId xmlns:a16="http://schemas.microsoft.com/office/drawing/2014/main" id="{E390095D-578A-0F21-3B23-5E859C77E83B}"/>
+              </a:ext>
+            </a:extLst>
+          </p:cNvPr>
+          <p:cNvSpPr txBox="1"/>
+          <p:nvPr/>
+        </p:nvSpPr>
+        <p:spPr>
+          <a:xfrm>
+            <a:off x="6051683" y="3719653"/>
+            <a:ext cx="686972" cy="253916"/>
+          </a:xfrm>
+          <a:prstGeom prst="rect">
+            <a:avLst/>
+          </a:prstGeom>
+          <a:solidFill>
+            <a:schemeClr val="bg1"/>
+          </a:solidFill>
+        </p:spPr>
+        <p:txBody>
+          <a:bodyPr wrap="square" rtlCol="0">
+            <a:spAutoFit/>
+          </a:bodyPr>
+          <a:lstStyle/>
+          <a:p>
+            <a:r>
+              <a:rPr lang="en-US" sz="1050" dirty="0">
+                <a:solidFill>
+                  <a:srgbClr val="545454"/>
+                </a:solidFill>
+              </a:rPr>
+              <a:t>Latitude</a:t>
+            </a:r>
+          </a:p>
+        </p:txBody>
+      </p:sp>
+      <p:sp>
+        <p:nvSpPr>
+          <p:cNvPr id="28" name="TextBox 27">
+            <a:extLst>
+              <a:ext uri="{FF2B5EF4-FFF2-40B4-BE49-F238E27FC236}">
+                <a16:creationId xmlns:a16="http://schemas.microsoft.com/office/drawing/2014/main" id="{8E3F7A4B-26FD-BB62-2BD9-BC1B382FBC08}"/>
+              </a:ext>
+            </a:extLst>
+          </p:cNvPr>
+          <p:cNvSpPr txBox="1"/>
+          <p:nvPr/>
+        </p:nvSpPr>
+        <p:spPr>
+          <a:xfrm>
+            <a:off x="6225719" y="4075780"/>
+            <a:ext cx="686972" cy="253916"/>
+          </a:xfrm>
+          <a:prstGeom prst="rect">
+            <a:avLst/>
+          </a:prstGeom>
+          <a:solidFill>
+            <a:schemeClr val="bg1"/>
+          </a:solidFill>
+        </p:spPr>
+        <p:txBody>
+          <a:bodyPr wrap="square" rtlCol="0">
+            <a:spAutoFit/>
+          </a:bodyPr>
+          <a:lstStyle/>
+          <a:p>
+            <a:r>
+              <a:rPr lang="en-US" sz="1050" dirty="0">
+                <a:solidFill>
+                  <a:srgbClr val="545454"/>
+                </a:solidFill>
+              </a:rPr>
+              <a:t>Year</a:t>
+            </a:r>
+          </a:p>
+        </p:txBody>
+      </p:sp>
+      <p:sp>
+        <p:nvSpPr>
+          <p:cNvPr id="30" name="TextBox 29">
+            <a:extLst>
+              <a:ext uri="{FF2B5EF4-FFF2-40B4-BE49-F238E27FC236}">
+                <a16:creationId xmlns:a16="http://schemas.microsoft.com/office/drawing/2014/main" id="{8967DFC5-52B2-99E5-F789-5AE7BCD98136}"/>
+              </a:ext>
+            </a:extLst>
+          </p:cNvPr>
+          <p:cNvSpPr txBox="1"/>
+          <p:nvPr/>
+        </p:nvSpPr>
+        <p:spPr>
+          <a:xfrm>
+            <a:off x="5920737" y="4385139"/>
+            <a:ext cx="751027" cy="253916"/>
+          </a:xfrm>
+          <a:prstGeom prst="rect">
+            <a:avLst/>
+          </a:prstGeom>
+          <a:solidFill>
+            <a:schemeClr val="bg1"/>
+          </a:solidFill>
+        </p:spPr>
+        <p:txBody>
+          <a:bodyPr wrap="square" rtlCol="0">
+            <a:spAutoFit/>
+          </a:bodyPr>
+          <a:lstStyle/>
+          <a:p>
+            <a:r>
+              <a:rPr lang="en-US" sz="1050" dirty="0">
+                <a:solidFill>
+                  <a:srgbClr val="545454"/>
+                </a:solidFill>
+              </a:rPr>
+              <a:t>Longitude</a:t>
+            </a:r>
+          </a:p>
+        </p:txBody>
+      </p:sp>
+      <p:sp>
+        <p:nvSpPr>
+          <p:cNvPr id="32" name="TextBox 31">
+            <a:extLst>
+              <a:ext uri="{FF2B5EF4-FFF2-40B4-BE49-F238E27FC236}">
+                <a16:creationId xmlns:a16="http://schemas.microsoft.com/office/drawing/2014/main" id="{E846F3E7-EFF5-5199-D9E3-9A47FF0BE00E}"/>
+              </a:ext>
+            </a:extLst>
+          </p:cNvPr>
+          <p:cNvSpPr txBox="1"/>
+          <p:nvPr/>
+        </p:nvSpPr>
+        <p:spPr>
+          <a:xfrm>
+            <a:off x="6126480" y="4723552"/>
+            <a:ext cx="686972" cy="253916"/>
+          </a:xfrm>
+          <a:prstGeom prst="rect">
+            <a:avLst/>
+          </a:prstGeom>
+          <a:solidFill>
+            <a:schemeClr val="bg1"/>
+          </a:solidFill>
+        </p:spPr>
+        <p:txBody>
+          <a:bodyPr wrap="square" rtlCol="0">
+            <a:spAutoFit/>
+          </a:bodyPr>
+          <a:lstStyle/>
+          <a:p>
+            <a:r>
+              <a:rPr lang="en-US" sz="1050" dirty="0">
+                <a:solidFill>
+                  <a:srgbClr val="545454"/>
+                </a:solidFill>
+              </a:rPr>
+              <a:t>Month</a:t>
+            </a:r>
           </a:p>
         </p:txBody>
       </p:sp>
@@ -5186,7 +6371,7 @@
           <a:lstStyle/>
           <a:p>
             <a:r>
-              <a:rPr lang="en-US" dirty="0"/>
+              <a:rPr lang="en-US" b="1" dirty="0"/>
               <a:t>Recommendation</a:t>
             </a:r>
           </a:p>
@@ -5210,9 +6395,88 @@
         </p:nvSpPr>
         <p:spPr/>
         <p:txBody>
-          <a:bodyPr/>
-          <a:lstStyle/>
-          <a:p>
+          <a:bodyPr>
+            <a:normAutofit/>
+          </a:bodyPr>
+          <a:lstStyle/>
+          <a:p>
+            <a:pPr marL="0" indent="0">
+              <a:buNone/>
+            </a:pPr>
+            <a:r>
+              <a:rPr lang="en-US" dirty="0"/>
+              <a:t>Colombia: throw every resource available at it or give it the Maduro treatment.</a:t>
+            </a:r>
+          </a:p>
+          <a:p>
+            <a:pPr marL="0" indent="0">
+              <a:buNone/>
+            </a:pPr>
+            <a:r>
+              <a:rPr lang="en-US" dirty="0"/>
+              <a:t>- Increase emergency responders, community programs, and monitoring efforts</a:t>
+            </a:r>
+          </a:p>
+          <a:p>
+            <a:pPr>
+              <a:buFontTx/>
+              <a:buChar char="-"/>
+            </a:pPr>
+            <a:endParaRPr lang="en-US" dirty="0"/>
+          </a:p>
+          <a:p>
+            <a:pPr marL="0" indent="0">
+              <a:buNone/>
+            </a:pPr>
+            <a:r>
+              <a:rPr lang="en-US" dirty="0"/>
+              <a:t>North America: Increase awareness and monitoring capabilities. </a:t>
+            </a:r>
+          </a:p>
+          <a:p>
+            <a:pPr marL="0" indent="0">
+              <a:buNone/>
+            </a:pPr>
+            <a:r>
+              <a:rPr lang="en-US" dirty="0"/>
+              <a:t>- Casualty counts are typically lower in these areas, but monitoring and proactive programs aimed at preventing incidents will keep numbers and density lower. </a:t>
+            </a:r>
+          </a:p>
+          <a:p>
+            <a:pPr>
+              <a:buFont typeface="Wingdings" panose="05000000000000000000" pitchFamily="2" charset="2"/>
+              <a:buChar char="n"/>
+            </a:pPr>
+            <a:endParaRPr lang="en-US" dirty="0"/>
+          </a:p>
+          <a:p>
+            <a:pPr marL="0" indent="0">
+              <a:buNone/>
+            </a:pPr>
+            <a:r>
+              <a:rPr lang="en-US" dirty="0"/>
+              <a:t>Risks: Casualty counts will increase without the commitment of resources to counter the positive incident trends shown in our </a:t>
+            </a:r>
+            <a:r>
+              <a:rPr lang="en-US" dirty="0" err="1"/>
+              <a:t>analysis.git</a:t>
+            </a:r>
+            <a:r>
+              <a:rPr lang="en-US"/>
+              <a:t> </a:t>
+            </a:r>
+            <a:endParaRPr lang="en-US" dirty="0"/>
+          </a:p>
+          <a:p>
+            <a:pPr marL="0" indent="0">
+              <a:buNone/>
+            </a:pPr>
+            <a:endParaRPr lang="en-US" dirty="0"/>
+          </a:p>
+          <a:p>
+            <a:pPr marL="0" indent="0">
+              <a:buNone/>
+            </a:pPr>
             <a:endParaRPr lang="en-US" dirty="0"/>
           </a:p>
         </p:txBody>
@@ -5511,4 +6775,319 @@
     </a:ext>
   </a:extLst>
 </a:theme>
+</file>
+
+<file path=ppt/theme/theme2.xml><?xml version="1.0" encoding="utf-8"?>
+<a:theme xmlns:a="http://schemas.openxmlformats.org/drawingml/2006/main" name="Office Theme">
+  <a:themeElements>
+    <a:clrScheme name="Office">
+      <a:dk1>
+        <a:sysClr val="windowText" lastClr="000000"/>
+      </a:dk1>
+      <a:lt1>
+        <a:sysClr val="window" lastClr="FFFFFF"/>
+      </a:lt1>
+      <a:dk2>
+        <a:srgbClr val="0E2841"/>
+      </a:dk2>
+      <a:lt2>
+        <a:srgbClr val="E8E8E8"/>
+      </a:lt2>
+      <a:accent1>
+        <a:srgbClr val="156082"/>
+      </a:accent1>
+      <a:accent2>
+        <a:srgbClr val="E97132"/>
+      </a:accent2>
+      <a:accent3>
+        <a:srgbClr val="196B24"/>
+      </a:accent3>
+      <a:accent4>
+        <a:srgbClr val="0F9ED5"/>
+      </a:accent4>
+      <a:accent5>
+        <a:srgbClr val="A02B93"/>
+      </a:accent5>
+      <a:accent6>
+        <a:srgbClr val="4EA72E"/>
+      </a:accent6>
+      <a:hlink>
+        <a:srgbClr val="467886"/>
+      </a:hlink>
+      <a:folHlink>
+        <a:srgbClr val="96607D"/>
+      </a:folHlink>
+    </a:clrScheme>
+    <a:fontScheme name="Office">
+      <a:majorFont>
+        <a:latin typeface="Aptos Display" panose="02110004020202020204"/>
+        <a:ea typeface=""/>
+        <a:cs typeface=""/>
+        <a:font script="Jpan" typeface="游ゴシック Light"/>
+        <a:font script="Hang" typeface="맑은 고딕"/>
+        <a:font script="Hans" typeface="等线 Light"/>
+        <a:font script="Hant" typeface="新細明體"/>
+        <a:font script="Arab" typeface="Times New Roman"/>
+        <a:font script="Hebr" typeface="Times New Roman"/>
+        <a:font script="Thai" typeface="Angsana New"/>
+        <a:font script="Ethi" typeface="Nyala"/>
+        <a:font script="Beng" typeface="Vrinda"/>
+        <a:font script="Gujr" typeface="Shruti"/>
+        <a:font script="Khmr" typeface="MoolBoran"/>
+        <a:font script="Knda" typeface="Tunga"/>
+        <a:font script="Guru" typeface="Raavi"/>
+        <a:font script="Cans" typeface="Euphemia"/>
+        <a:font script="Cher" typeface="Plantagenet Cherokee"/>
+        <a:font script="Yiii" typeface="Microsoft Yi Baiti"/>
+        <a:font script="Tibt" typeface="Microsoft Himalaya"/>
+        <a:font script="Thaa" typeface="MV Boli"/>
+        <a:font script="Deva" typeface="Mangal"/>
+        <a:font script="Telu" typeface="Gautami"/>
+        <a:font script="Taml" typeface="Latha"/>
+        <a:font script="Syrc" typeface="Estrangelo Edessa"/>
+        <a:font script="Orya" typeface="Kalinga"/>
+        <a:font script="Mlym" typeface="Kartika"/>
+        <a:font script="Laoo" typeface="DokChampa"/>
+        <a:font script="Sinh" typeface="Iskoola Pota"/>
+        <a:font script="Mong" typeface="Mongolian Baiti"/>
+        <a:font script="Viet" typeface="Times New Roman"/>
+        <a:font script="Uigh" typeface="Microsoft Uighur"/>
+        <a:font script="Geor" typeface="Sylfaen"/>
+        <a:font script="Armn" typeface="Arial"/>
+        <a:font script="Bugi" typeface="Leelawadee UI"/>
+        <a:font script="Bopo" typeface="Microsoft JhengHei"/>
+        <a:font script="Java" typeface="Javanese Text"/>
+        <a:font script="Lisu" typeface="Segoe UI"/>
+        <a:font script="Mymr" typeface="Myanmar Text"/>
+        <a:font script="Nkoo" typeface="Ebrima"/>
+        <a:font script="Olck" typeface="Nirmala UI"/>
+        <a:font script="Osma" typeface="Ebrima"/>
+        <a:font script="Phag" typeface="Phagspa"/>
+        <a:font script="Syrn" typeface="Estrangelo Edessa"/>
+        <a:font script="Syrj" typeface="Estrangelo Edessa"/>
+        <a:font script="Syre" typeface="Estrangelo Edessa"/>
+        <a:font script="Sora" typeface="Nirmala UI"/>
+        <a:font script="Tale" typeface="Microsoft Tai Le"/>
+        <a:font script="Talu" typeface="Microsoft New Tai Lue"/>
+        <a:font script="Tfng" typeface="Ebrima"/>
+      </a:majorFont>
+      <a:minorFont>
+        <a:latin typeface="Aptos" panose="02110004020202020204"/>
+        <a:ea typeface=""/>
+        <a:cs typeface=""/>
+        <a:font script="Jpan" typeface="游ゴシック"/>
+        <a:font script="Hang" typeface="맑은 고딕"/>
+        <a:font script="Hans" typeface="等线"/>
+        <a:font script="Hant" typeface="新細明體"/>
+        <a:font script="Arab" typeface="Arial"/>
+        <a:font script="Hebr" typeface="Arial"/>
+        <a:font script="Thai" typeface="Cordia New"/>
+        <a:font script="Ethi" typeface="Nyala"/>
+        <a:font script="Beng" typeface="Vrinda"/>
+        <a:font script="Gujr" typeface="Shruti"/>
+        <a:font script="Khmr" typeface="DaunPenh"/>
+        <a:font script="Knda" typeface="Tunga"/>
+        <a:font script="Guru" typeface="Raavi"/>
+        <a:font script="Cans" typeface="Euphemia"/>
+        <a:font script="Cher" typeface="Plantagenet Cherokee"/>
+        <a:font script="Yiii" typeface="Microsoft Yi Baiti"/>
+        <a:font script="Tibt" typeface="Microsoft Himalaya"/>
+        <a:font script="Thaa" typeface="MV Boli"/>
+        <a:font script="Deva" typeface="Mangal"/>
+        <a:font script="Telu" typeface="Gautami"/>
+        <a:font script="Taml" typeface="Latha"/>
+        <a:font script="Syrc" typeface="Estrangelo Edessa"/>
+        <a:font script="Orya" typeface="Kalinga"/>
+        <a:font script="Mlym" typeface="Kartika"/>
+        <a:font script="Laoo" typeface="DokChampa"/>
+        <a:font script="Sinh" typeface="Iskoola Pota"/>
+        <a:font script="Mong" typeface="Mongolian Baiti"/>
+        <a:font script="Viet" typeface="Arial"/>
+        <a:font script="Uigh" typeface="Microsoft Uighur"/>
+        <a:font script="Geor" typeface="Sylfaen"/>
+        <a:font script="Armn" typeface="Arial"/>
+        <a:font script="Bugi" typeface="Leelawadee UI"/>
+        <a:font script="Bopo" typeface="Microsoft JhengHei"/>
+        <a:font script="Java" typeface="Javanese Text"/>
+        <a:font script="Lisu" typeface="Segoe UI"/>
+        <a:font script="Mymr" typeface="Myanmar Text"/>
+        <a:font script="Nkoo" typeface="Ebrima"/>
+        <a:font script="Olck" typeface="Nirmala UI"/>
+        <a:font script="Osma" typeface="Ebrima"/>
+        <a:font script="Phag" typeface="Phagspa"/>
+        <a:font script="Syrn" typeface="Estrangelo Edessa"/>
+        <a:font script="Syrj" typeface="Estrangelo Edessa"/>
+        <a:font script="Syre" typeface="Estrangelo Edessa"/>
+        <a:font script="Sora" typeface="Nirmala UI"/>
+        <a:font script="Tale" typeface="Microsoft Tai Le"/>
+        <a:font script="Talu" typeface="Microsoft New Tai Lue"/>
+        <a:font script="Tfng" typeface="Ebrima"/>
+      </a:minorFont>
+    </a:fontScheme>
+    <a:fmtScheme name="Office">
+      <a:fillStyleLst>
+        <a:solidFill>
+          <a:schemeClr val="phClr"/>
+        </a:solidFill>
+        <a:gradFill rotWithShape="1">
+          <a:gsLst>
+            <a:gs pos="0">
+              <a:schemeClr val="phClr">
+                <a:lumMod val="110000"/>
+                <a:satMod val="105000"/>
+                <a:tint val="67000"/>
+              </a:schemeClr>
+            </a:gs>
+            <a:gs pos="50000">
+              <a:schemeClr val="phClr">
+                <a:lumMod val="105000"/>
+                <a:satMod val="103000"/>
+                <a:tint val="73000"/>
+              </a:schemeClr>
+            </a:gs>
+            <a:gs pos="100000">
+              <a:schemeClr val="phClr">
+                <a:lumMod val="105000"/>
+                <a:satMod val="109000"/>
+                <a:tint val="81000"/>
+              </a:schemeClr>
+            </a:gs>
+          </a:gsLst>
+          <a:lin ang="5400000" scaled="0"/>
+        </a:gradFill>
+        <a:gradFill rotWithShape="1">
+          <a:gsLst>
+            <a:gs pos="0">
+              <a:schemeClr val="phClr">
+                <a:satMod val="103000"/>
+                <a:lumMod val="102000"/>
+                <a:tint val="94000"/>
+              </a:schemeClr>
+            </a:gs>
+            <a:gs pos="50000">
+              <a:schemeClr val="phClr">
+                <a:satMod val="110000"/>
+                <a:lumMod val="100000"/>
+                <a:shade val="100000"/>
+              </a:schemeClr>
+            </a:gs>
+            <a:gs pos="100000">
+              <a:schemeClr val="phClr">
+                <a:lumMod val="99000"/>
+                <a:satMod val="120000"/>
+                <a:shade val="78000"/>
+              </a:schemeClr>
+            </a:gs>
+          </a:gsLst>
+          <a:lin ang="5400000" scaled="0"/>
+        </a:gradFill>
+      </a:fillStyleLst>
+      <a:lnStyleLst>
+        <a:ln w="12700" cap="flat" cmpd="sng" algn="ctr">
+          <a:solidFill>
+            <a:schemeClr val="phClr"/>
+          </a:solidFill>
+          <a:prstDash val="solid"/>
+          <a:miter lim="800000"/>
+        </a:ln>
+        <a:ln w="19050" cap="flat" cmpd="sng" algn="ctr">
+          <a:solidFill>
+            <a:schemeClr val="phClr"/>
+          </a:solidFill>
+          <a:prstDash val="solid"/>
+          <a:miter lim="800000"/>
+        </a:ln>
+        <a:ln w="25400" cap="flat" cmpd="sng" algn="ctr">
+          <a:solidFill>
+            <a:schemeClr val="phClr"/>
+          </a:solidFill>
+          <a:prstDash val="solid"/>
+          <a:miter lim="800000"/>
+        </a:ln>
+      </a:lnStyleLst>
+      <a:effectStyleLst>
+        <a:effectStyle>
+          <a:effectLst/>
+        </a:effectStyle>
+        <a:effectStyle>
+          <a:effectLst/>
+        </a:effectStyle>
+        <a:effectStyle>
+          <a:effectLst>
+            <a:outerShdw blurRad="57150" dist="19050" dir="5400000" algn="ctr" rotWithShape="0">
+              <a:srgbClr val="000000">
+                <a:alpha val="63000"/>
+              </a:srgbClr>
+            </a:outerShdw>
+          </a:effectLst>
+        </a:effectStyle>
+      </a:effectStyleLst>
+      <a:bgFillStyleLst>
+        <a:solidFill>
+          <a:schemeClr val="phClr"/>
+        </a:solidFill>
+        <a:solidFill>
+          <a:schemeClr val="phClr">
+            <a:tint val="95000"/>
+            <a:satMod val="170000"/>
+          </a:schemeClr>
+        </a:solidFill>
+        <a:gradFill rotWithShape="1">
+          <a:gsLst>
+            <a:gs pos="0">
+              <a:schemeClr val="phClr">
+                <a:tint val="93000"/>
+                <a:satMod val="150000"/>
+                <a:shade val="98000"/>
+                <a:lumMod val="102000"/>
+              </a:schemeClr>
+            </a:gs>
+            <a:gs pos="50000">
+              <a:schemeClr val="phClr">
+                <a:tint val="98000"/>
+                <a:satMod val="130000"/>
+                <a:shade val="90000"/>
+                <a:lumMod val="103000"/>
+              </a:schemeClr>
+            </a:gs>
+            <a:gs pos="100000">
+              <a:schemeClr val="phClr">
+                <a:shade val="63000"/>
+                <a:satMod val="120000"/>
+              </a:schemeClr>
+            </a:gs>
+          </a:gsLst>
+          <a:lin ang="5400000" scaled="0"/>
+        </a:gradFill>
+      </a:bgFillStyleLst>
+    </a:fmtScheme>
+  </a:themeElements>
+  <a:objectDefaults>
+    <a:lnDef>
+      <a:spPr/>
+      <a:bodyPr/>
+      <a:lstStyle/>
+      <a:style>
+        <a:lnRef idx="2">
+          <a:schemeClr val="accent1"/>
+        </a:lnRef>
+        <a:fillRef idx="0">
+          <a:schemeClr val="accent1"/>
+        </a:fillRef>
+        <a:effectRef idx="1">
+          <a:schemeClr val="accent1"/>
+        </a:effectRef>
+        <a:fontRef idx="minor">
+          <a:schemeClr val="tx1"/>
+        </a:fontRef>
+      </a:style>
+    </a:lnDef>
+  </a:objectDefaults>
+  <a:extraClrSchemeLst/>
+  <a:extLst>
+    <a:ext uri="{05A4C25C-085E-4340-85A3-A5531E510DB2}">
+      <thm15:themeFamily xmlns:thm15="http://schemas.microsoft.com/office/thememl/2012/main" name="Office Theme" id="{2E142A2C-CD16-42D6-873A-C26D2A0506FA}" vid="{1BDDFF52-6CD6-40A5-AB3C-68EB2F1E4D0A}"/>
+    </a:ext>
+  </a:extLst>
+</a:theme>
 </file>